--- a/decks/combined-circuits/combined-circuits_ch1_symbols-and-circuits.pptx
+++ b/decks/combined-circuits/combined-circuits_ch1_symbols-and-circuits.pptx
@@ -124,29 +124,29 @@
   <p:extLst>
     <p:ext uri="{521415D9-36F7-43E2-AB2F-B90AF26B5E84}">
       <p14:sectionLst xmlns:p14="http://schemas.microsoft.com/office/powerpoint/2010/main">
-        <p14:section name="Opening" id="{338d87ef-8f62-71a6-d7d4-f42b5e6956c9}">
+        <p14:section name="Opening" id="{c6c28562-fce5-0daf-f28d-516f4239ce75}">
           <p14:sldIdLst>
             <p14:sldId id="256"/>
           </p14:sldIdLst>
         </p14:section>
-        <p14:section name="Gate" id="{159a857c-fafa-e8ad-d647-b668f85f94b2}">
+        <p14:section name="Gate" id="{d4d9a708-f025-91fc-0cd1-42690aa9587c}">
           <p14:sldIdLst>
             <p14:sldId id="257"/>
             <p14:sldId id="258"/>
           </p14:sldIdLst>
         </p14:section>
-        <p14:section name="Pre-teach" id="{f2559ca6-48cb-a23f-8859-588ae90b6ca7}">
+        <p14:section name="Pre-teach" id="{c2b6c34c-de25-16c4-5038-8800be497cb4}">
           <p14:sldIdLst>
             <p14:sldId id="259"/>
           </p14:sldIdLst>
         </p14:section>
-        <p14:section name="Read-along" id="{bcdda3a5-4ddd-6a45-1c7f-0e13a4a4cc68}">
+        <p14:section name="Read-along" id="{f66061f3-7917-62bb-72c7-bade18c59413}">
           <p14:sldIdLst>
             <p14:sldId id="260"/>
             <p14:sldId id="261"/>
           </p14:sldIdLst>
         </p14:section>
-        <p14:section name="Teach" id="{32daa686-f37a-b14b-1d01-3622b8d45d24}">
+        <p14:section name="Teach" id="{f2841daf-c54d-3036-5535-0d600d142a4e}">
           <p14:sldIdLst>
             <p14:sldId id="262"/>
             <p14:sldId id="263"/>
@@ -154,7 +154,7 @@
             <p14:sldId id="265"/>
           </p14:sldIdLst>
         </p14:section>
-        <p14:section name="Routes" id="{f1cdbb49-ec3e-f862-4f5b-d50a5450453e}">
+        <p14:section name="Routes" id="{8ef88388-3588-d585-fef8-9236287d0d92}">
           <p14:sldIdLst>
             <p14:sldId id="266"/>
             <p14:sldId id="267"/>
@@ -162,12 +162,12 @@
             <p14:sldId id="269"/>
           </p14:sldIdLst>
         </p14:section>
-        <p14:section name="Close" id="{a9af4d2d-63bd-7969-c9a9-7bb5dd7f6978}">
+        <p14:section name="Close" id="{926d5900-269b-2447-4df0-0493ee73b658}">
           <p14:sldIdLst>
             <p14:sldId id="270"/>
           </p14:sldIdLst>
         </p14:section>
-        <p14:section name="Answers" id="{36c4c9ad-0f21-ce9a-7814-8e1296c7949f}">
+        <p14:section name="Answers" id="{da682b5a-9ea9-9460-1f7f-2f5b3d2d25d4}">
           <p14:sldIdLst>
             <p14:sldId id="271"/>
             <p14:sldId id="272"/>
@@ -1504,7 +1504,7 @@
               <a:rPr lang="en-US" dirty="0"/>
               <a:t>Do now — retrieval. Silent, no notes, no help: recall comes before any support. Give about four minutes.
 1. Which component is drawn as a circle with the letter A inside?  →  B   ammeter
-2. What is a battery?  →  B   two or more cells joined together
+2. What is a battery?  →  C   two or more cells joined together
 3. A diode lets current flow in ___ direction only.  →  one
 Circulate: who gets 3/3 (Stretch route), 2/3 (Core), 0–1 (Support)? Use this to route pupils later in the lesson.</a:t>
             </a:r>
@@ -1596,7 +1596,7 @@
               <a:rPr lang="en-US" dirty="0"/>
               <a:t>Answers — pupils mark their own in a different colour, then hands up for 3/3, 2/3, 1/3.
 1. B   ammeter. A circle with A is an ammeter, which measures current in amps. A circle with V is a voltmeter.
-2. B   two or more cells joined together. A battery is two or more cells connected together.
+2. C   two or more cells joined together. A battery is two or more cells connected together.
 3. one. A diode is like a one-way valve: current flows through it one way, not the other.
 Say the route each score points to: 3/3 Stretch, 2/3 Core, 0–1 Support. Pupils may choose to move up.</a:t>
             </a:r>
@@ -7310,7 +7310,7 @@
                 <a:ea typeface="Calibri" pitchFamily="34" charset="-122"/>
                 <a:cs typeface="Calibri" pitchFamily="34" charset="-120"/>
               </a:rPr>
-              <a:t>a small current, because only the lamp is switched off</a:t>
+              <a:t>the same current as when the switch is closed</a:t>
             </a:r>
             <a:endParaRPr lang="en-US" sz="2600" dirty="0"/>
           </a:p>
@@ -7347,7 +7347,7 @@
                 <a:ea typeface="Calibri" pitchFamily="34" charset="-122"/>
                 <a:cs typeface="Calibri" pitchFamily="34" charset="-120"/>
               </a:rPr>
-              <a:t>the same current as when the switch is closed</a:t>
+              <a:t>a larger current, because the switch has no resistance</a:t>
             </a:r>
             <a:endParaRPr lang="en-US" sz="2600" dirty="0"/>
           </a:p>
@@ -7384,7 +7384,7 @@
                 <a:ea typeface="Calibri" pitchFamily="34" charset="-122"/>
                 <a:cs typeface="Calibri" pitchFamily="34" charset="-120"/>
               </a:rPr>
-              <a:t>a larger current, because the switch has no resistance</a:t>
+              <a:t>a small current, because only the lamp is switched off</a:t>
             </a:r>
             <a:endParaRPr lang="en-US" sz="2600" dirty="0"/>
           </a:p>
@@ -8788,7 +8788,7 @@
                 <a:ea typeface="Calibri" pitchFamily="34" charset="-122"/>
                 <a:cs typeface="Calibri" pitchFamily="34" charset="-120"/>
               </a:rPr>
-              <a:t>The current increases and the lamp gets brighter.</a:t>
+              <a:t>The current stays the same and the lamp stays the same.</a:t>
             </a:r>
             <a:endParaRPr lang="en-US" sz="2400" dirty="0"/>
           </a:p>
@@ -8825,7 +8825,7 @@
                 <a:ea typeface="Calibri" pitchFamily="34" charset="-122"/>
                 <a:cs typeface="Calibri" pitchFamily="34" charset="-120"/>
               </a:rPr>
-              <a:t>The current stays the same and the lamp stays the same.</a:t>
+              <a:t>The current decreases and the lamp gets brighter.</a:t>
             </a:r>
             <a:endParaRPr lang="en-US" sz="2400" dirty="0"/>
           </a:p>
@@ -8862,7 +8862,7 @@
                 <a:ea typeface="Calibri" pitchFamily="34" charset="-122"/>
                 <a:cs typeface="Calibri" pitchFamily="34" charset="-120"/>
               </a:rPr>
-              <a:t>The current decreases and the lamp gets brighter.</a:t>
+              <a:t>The current increases and the lamp gets brighter.</a:t>
             </a:r>
             <a:endParaRPr lang="en-US" sz="2400" dirty="0"/>
           </a:p>
@@ -10941,7 +10941,7 @@
                 <a:ea typeface="Calibri" pitchFamily="34" charset="-122"/>
                 <a:cs typeface="Calibri" pitchFamily="34" charset="-120"/>
               </a:rPr>
-              <a:t>lamp</a:t>
+              <a:t>cell</a:t>
             </a:r>
             <a:endParaRPr lang="en-US" sz="2400" dirty="0"/>
           </a:p>
@@ -10978,7 +10978,7 @@
                 <a:ea typeface="Calibri" pitchFamily="34" charset="-122"/>
                 <a:cs typeface="Calibri" pitchFamily="34" charset="-120"/>
               </a:rPr>
-              <a:t>cell</a:t>
+              <a:t>lamp</a:t>
             </a:r>
             <a:endParaRPr lang="en-US" sz="2400" dirty="0"/>
           </a:p>
@@ -11219,7 +11219,7 @@
                 <a:ea typeface="Calibri" pitchFamily="34" charset="-122"/>
                 <a:cs typeface="Calibri" pitchFamily="34" charset="-120"/>
               </a:rPr>
-              <a:t>two or more cells joined together</a:t>
+              <a:t>a cell with a switch</a:t>
             </a:r>
             <a:endParaRPr lang="en-US" sz="2400" dirty="0"/>
           </a:p>
@@ -11256,7 +11256,7 @@
                 <a:ea typeface="Calibri" pitchFamily="34" charset="-122"/>
                 <a:cs typeface="Calibri" pitchFamily="34" charset="-120"/>
               </a:rPr>
-              <a:t>a cell with a switch</a:t>
+              <a:t>two or more cells joined together</a:t>
             </a:r>
             <a:endParaRPr lang="en-US" sz="2400" dirty="0"/>
           </a:p>
@@ -12142,7 +12142,7 @@
                 <a:ea typeface="Calibri" pitchFamily="34" charset="-122"/>
                 <a:cs typeface="Calibri" pitchFamily="34" charset="-120"/>
               </a:rPr>
-              <a:t>B   two or more cells joined together</a:t>
+              <a:t>C   two or more cells joined together</a:t>
             </a:r>
             <a:endParaRPr lang="en-US" sz="2200" dirty="0"/>
           </a:p>

--- a/decks/combined-circuits/combined-circuits_ch1_symbols-and-circuits.pptx
+++ b/decks/combined-circuits/combined-circuits_ch1_symbols-and-circuits.pptx
@@ -124,29 +124,29 @@
   <p:extLst>
     <p:ext uri="{521415D9-36F7-43E2-AB2F-B90AF26B5E84}">
       <p14:sectionLst xmlns:p14="http://schemas.microsoft.com/office/powerpoint/2010/main">
-        <p14:section name="Opening" id="{c6c28562-fce5-0daf-f28d-516f4239ce75}">
+        <p14:section name="Opening" id="{e0f5a753-983a-2bbd-cd18-1ff406e746c1}">
           <p14:sldIdLst>
             <p14:sldId id="256"/>
           </p14:sldIdLst>
         </p14:section>
-        <p14:section name="Gate" id="{d4d9a708-f025-91fc-0cd1-42690aa9587c}">
+        <p14:section name="Gate" id="{bd30e507-f7fe-f3d3-e979-315e7a1a42e5}">
           <p14:sldIdLst>
             <p14:sldId id="257"/>
             <p14:sldId id="258"/>
           </p14:sldIdLst>
         </p14:section>
-        <p14:section name="Pre-teach" id="{c2b6c34c-de25-16c4-5038-8800be497cb4}">
+        <p14:section name="Pre-teach" id="{4d1869c8-5133-fb21-d402-1a9a4fd7658e}">
           <p14:sldIdLst>
             <p14:sldId id="259"/>
           </p14:sldIdLst>
         </p14:section>
-        <p14:section name="Read-along" id="{f66061f3-7917-62bb-72c7-bade18c59413}">
+        <p14:section name="Read-along" id="{1be7ecc0-0853-4af2-6f0f-0f0cd48ae927}">
           <p14:sldIdLst>
             <p14:sldId id="260"/>
             <p14:sldId id="261"/>
           </p14:sldIdLst>
         </p14:section>
-        <p14:section name="Teach" id="{f2841daf-c54d-3036-5535-0d600d142a4e}">
+        <p14:section name="Teach" id="{6611db66-3460-7af9-cf45-c85a80202aa9}">
           <p14:sldIdLst>
             <p14:sldId id="262"/>
             <p14:sldId id="263"/>
@@ -154,7 +154,7 @@
             <p14:sldId id="265"/>
           </p14:sldIdLst>
         </p14:section>
-        <p14:section name="Routes" id="{8ef88388-3588-d585-fef8-9236287d0d92}">
+        <p14:section name="Routes" id="{688a0a89-2bf9-8f4c-337d-c3fc0ef9cd3d}">
           <p14:sldIdLst>
             <p14:sldId id="266"/>
             <p14:sldId id="267"/>
@@ -162,12 +162,12 @@
             <p14:sldId id="269"/>
           </p14:sldIdLst>
         </p14:section>
-        <p14:section name="Close" id="{926d5900-269b-2447-4df0-0493ee73b658}">
+        <p14:section name="Close" id="{65f7ff27-3513-3f64-8597-3f1495adcc08}">
           <p14:sldIdLst>
             <p14:sldId id="270"/>
           </p14:sldIdLst>
         </p14:section>
-        <p14:section name="Answers" id="{da682b5a-9ea9-9460-1f7f-2f5b3d2d25d4}">
+        <p14:section name="Answers" id="{200e9350-34fd-3b61-f6ce-c3eeb0df2d64}">
           <p14:sldIdLst>
             <p14:sldId id="271"/>
             <p14:sldId id="272"/>
